--- a/docs/decks/BrokerVerse_User_Access_Administrator_Guide.pptx
+++ b/docs/decks/BrokerVerse_User_Access_Administrator_Guide.pptx
@@ -3272,7 +3272,7 @@
                 </a:solidFill>
                 <a:latin typeface="Calibri"/>
               </a:rPr>
-              <a:t>BDO Insure (BDOI) insurance broking · Philippines · PHP</a:t>
+              <a:t>BrokerVerse OOTB · insurance broking · Philippines · PHP</a:t>
             </a:r>
           </a:p>
         </p:txBody>
@@ -6662,7 +6662,7 @@
                           </a:solidFill>
                           <a:latin typeface="Calibri"/>
                         </a:rPr>
-                        <a:t>Active and inactive users with their roles</a:t>
+                        <a:t>Active, inactive and locked users with their roles</a:t>
                       </a:r>
                     </a:p>
                   </a:txBody>
@@ -6846,7 +6846,7 @@
                           </a:solidFill>
                           <a:latin typeface="Calibri"/>
                         </a:rPr>
-                        <a:t>Per-user sign-in history through the user API (IT administrator)</a:t>
+                        <a:t>User row &gt; … &gt; Sign-in history: every attempt with result and detail</a:t>
                       </a:r>
                     </a:p>
                   </a:txBody>
@@ -7697,7 +7697,7 @@
                 </a:solidFill>
                 <a:latin typeface="Calibri"/>
               </a:rPr>
-              <a:t>The bell shows general notices; there are no approvals for this role.</a:t>
+              <a:t>The bell shows general notices; approvals are addressed to other roles.</a:t>
             </a:r>
           </a:p>
         </p:txBody>
@@ -8239,7 +8239,7 @@
                 </a:solidFill>
                 <a:latin typeface="Calibri"/>
               </a:rPr>
-              <a:t>User list shows the role code in capitals and names in upper case; action icons are small.</a:t>
+              <a:t>A user with no e-mail address (older records) cannot use Forgot password and shows “-” in the E-mail column.</a:t>
             </a:r>
           </a:p>
           <a:p>
@@ -8260,7 +8260,7 @@
                 </a:solidFill>
                 <a:latin typeface="Calibri"/>
               </a:rPr>
-              <a:t>E-mail column is empty when a user has none.</a:t>
+              <a:t>The temporary password is shown only once: copy it before you close the dialog.</a:t>
             </a:r>
           </a:p>
           <a:p>
@@ -8281,7 +8281,7 @@
                 </a:solidFill>
                 <a:latin typeface="Calibri"/>
               </a:rPr>
-              <a:t>There is no dedicated sign-in history screen yet: use the audit trail (session / login).</a:t>
+              <a:t>Your session is kept in the browser’s local storage: sign out on shared computers and keep the browser up to date.</a:t>
             </a:r>
           </a:p>
           <a:p>
@@ -8302,7 +8302,28 @@
                 </a:solidFill>
                 <a:latin typeface="Calibri"/>
               </a:rPr>
-              <a:t>A few screens use the browser’s own confirm boxes instead of in-app dialogs.</a:t>
+              <a:t>Two-factor set-up shows a setup key and an app link, but no QR code: type the key into the authenticator app.</a:t>
+            </a:r>
+          </a:p>
+          <a:p>
+            <a:pPr marL="201168" indent="-182880">
+              <a:spcAft>
+                <a:spcPts val="800"/>
+              </a:spcAft>
+              <a:buClr>
+                <a:srgbClr val="5B6778"/>
+              </a:buClr>
+              <a:buFont typeface="Arial"/>
+              <a:buChar char="•"/>
+            </a:pPr>
+            <a:r>
+              <a:rPr sz="1500">
+                <a:solidFill>
+                  <a:srgbClr val="1F2937"/>
+                </a:solidFill>
+                <a:latin typeface="Calibri"/>
+              </a:rPr>
+              <a:t>Screens are in English or Thai; Filipino is configured but has no translation yet.</a:t>
             </a:r>
           </a:p>
         </p:txBody>
@@ -8793,7 +8814,7 @@
                 </a:solidFill>
                 <a:latin typeface="Calibri"/>
               </a:rPr>
-              <a:t>&lt;to be confirmed by BDOI&gt;</a:t>
+              <a:t>&lt;service desk to be confirmed&gt;</a:t>
             </a:r>
           </a:p>
         </p:txBody>
@@ -9442,7 +9463,7 @@
                 </a:solidFill>
                 <a:latin typeface="Calibri"/>
               </a:rPr>
-              <a:t>audit trail and sign-in history for access reviews.</a:t>
+              <a:t>sign-in history per user and the audit trail for access reviews.</a:t>
             </a:r>
           </a:p>
           <a:p>
@@ -10763,7 +10784,7 @@
                 </a:solidFill>
                 <a:latin typeface="Calibri"/>
               </a:rPr>
-              <a:t>Users</a:t>
+              <a:t>Users and account actions</a:t>
             </a:r>
           </a:p>
         </p:txBody>
@@ -10871,7 +10892,7 @@
                 </a:solidFill>
                 <a:latin typeface="Calibri"/>
               </a:rPr>
-              <a:t>Same screen as the access administrator sees (captured as BrokerVerse; your sidebar shows only Master)</a:t>
+              <a:t>Live screen — User list with the account actions of a user — signed in as carmela.morfe</a:t>
             </a:r>
           </a:p>
         </p:txBody>
@@ -11003,7 +11024,7 @@
                 </a:solidFill>
                 <a:latin typeface="Calibri"/>
               </a:rPr>
-              <a:t>user list with role, e-mail, display name and status.</a:t>
+              <a:t>user list with role, e-mail, display name and status (Locked tag).</a:t>
             </a:r>
           </a:p>
           <a:p>
@@ -11033,7 +11054,7 @@
                 </a:solidFill>
                 <a:latin typeface="Calibri"/>
               </a:rPr>
-              <a:t>+ Add, view, edit, activate / deactivate, unlock.</a:t>
+              <a:t>Unlock, Reset password (temporary password shown once), Turn off two-step verification, Sign-in history.</a:t>
             </a:r>
           </a:p>
           <a:p>
@@ -11054,6 +11075,36 @@
                 </a:solidFill>
                 <a:latin typeface="Calibri"/>
               </a:rPr>
+              <a:t>Rule:  </a:t>
+            </a:r>
+            <a:r>
+              <a:rPr sz="1500">
+                <a:solidFill>
+                  <a:srgbClr val="1F2937"/>
+                </a:solidFill>
+                <a:latin typeface="Calibri"/>
+              </a:rPr>
+              <a:t>IT and business administrator accounts are handled by the IT administrator.</a:t>
+            </a:r>
+          </a:p>
+          <a:p>
+            <a:pPr marL="201168" indent="-182880">
+              <a:spcAft>
+                <a:spcPts val="1000"/>
+              </a:spcAft>
+              <a:buClr>
+                <a:srgbClr val="1E88E5"/>
+              </a:buClr>
+              <a:buFont typeface="Arial"/>
+              <a:buChar char="•"/>
+            </a:pPr>
+            <a:r>
+              <a:rPr b="1" sz="1500">
+                <a:solidFill>
+                  <a:srgbClr val="0B4F9C"/>
+                </a:solidFill>
+                <a:latin typeface="Calibri"/>
+              </a:rPr>
               <a:t>Leavers:  </a:t>
             </a:r>
             <a:r>
@@ -11063,7 +11114,7 @@
                 </a:solidFill>
                 <a:latin typeface="Calibri"/>
               </a:rPr>
-              <a:t>deactivate (soft delete); history is kept.</a:t>
+              <a:t>deactivate with the Status switch; history is kept and sessions end.</a:t>
             </a:r>
           </a:p>
         </p:txBody>
@@ -11296,24 +11347,22 @@
       </p:sp>
       <p:sp>
         <p:nvSpPr>
-          <p:cNvPr id="8" name="Rounded Rectangle 7"/>
+          <p:cNvPr id="8" name="Rectangle 7"/>
           <p:cNvSpPr/>
           <p:nvPr/>
         </p:nvSpPr>
         <p:spPr>
           <a:xfrm>
-            <a:off x="457200" y="1280160"/>
-            <a:ext cx="7269480" cy="4526280"/>
-          </a:xfrm>
-          <a:prstGeom prst="roundRect">
-            <a:avLst>
-              <a:gd name="adj" fmla="val 4000"/>
-            </a:avLst>
+            <a:off x="420624" y="1243584"/>
+            <a:ext cx="7315200" cy="4599432"/>
+          </a:xfrm>
+          <a:prstGeom prst="rect">
+            <a:avLst/>
           </a:prstGeom>
           <a:solidFill>
             <a:srgbClr val="FFFFFF"/>
           </a:solidFill>
-          <a:ln w="9525">
+          <a:ln w="12700">
             <a:solidFill>
               <a:srgbClr val="D5DEEA"/>
             </a:solidFill>
@@ -11342,768 +11391,38 @@
           </a:p>
         </p:txBody>
       </p:sp>
-      <p:sp>
-        <p:nvSpPr>
-          <p:cNvPr id="9" name="TextBox 8"/>
-          <p:cNvSpPr txBox="1"/>
-          <p:nvPr/>
-        </p:nvSpPr>
-        <p:spPr>
-          <a:xfrm>
-            <a:off x="777240" y="1463039"/>
-            <a:ext cx="6629400" cy="320040"/>
-          </a:xfrm>
-          <a:prstGeom prst="rect">
-            <a:avLst/>
-          </a:prstGeom>
-          <a:noFill/>
-        </p:spPr>
-        <p:txBody>
-          <a:bodyPr wrap="square" lIns="0" rIns="0" tIns="0" bIns="0" anchor="t"/>
-          <a:lstStyle/>
-          <a:p>
-            <a:pPr algn="l"/>
-            <a:r>
-              <a:rPr sz="1400" b="1" i="0">
-                <a:solidFill>
-                  <a:srgbClr val="0B4F9C"/>
-                </a:solidFill>
-                <a:latin typeface="Calibri"/>
-              </a:rPr>
-              <a:t>Step by step</a:t>
-            </a:r>
-          </a:p>
-        </p:txBody>
-      </p:sp>
-      <p:sp>
-        <p:nvSpPr>
-          <p:cNvPr id="10" name="Oval 9"/>
-          <p:cNvSpPr/>
-          <p:nvPr/>
-        </p:nvSpPr>
-        <p:spPr>
-          <a:xfrm>
-            <a:off x="868680" y="1965960"/>
-            <a:ext cx="384048" cy="384048"/>
-          </a:xfrm>
-          <a:prstGeom prst="ellipse">
-            <a:avLst/>
-          </a:prstGeom>
-          <a:solidFill>
-            <a:srgbClr val="1E88E5"/>
-          </a:solidFill>
-          <a:ln>
-            <a:noFill/>
+      <p:pic>
+        <p:nvPicPr>
+          <p:cNvPr id="9" name="Picture 8" descr="image.jpg"/>
+          <p:cNvPicPr>
+            <a:picLocks noChangeAspect="1"/>
+          </p:cNvPicPr>
+          <p:nvPr/>
+        </p:nvPicPr>
+        <p:blipFill>
+          <a:blip r:embed="rId3"/>
+          <a:stretch>
+            <a:fillRect/>
+          </a:stretch>
+        </p:blipFill>
+        <p:spPr>
+          <a:xfrm>
+            <a:off x="457200" y="1280160"/>
+            <a:ext cx="7242048" cy="4526280"/>
+          </a:xfrm>
+          <a:prstGeom prst="rect">
+            <a:avLst/>
+          </a:prstGeom>
+          <a:ln w="6350">
+            <a:solidFill>
+              <a:srgbClr val="D5DEEA"/>
+            </a:solidFill>
           </a:ln>
-          <a:effectLst/>
-        </p:spPr>
-        <p:style>
-          <a:lnRef idx="1">
-            <a:schemeClr val="accent1"/>
-          </a:lnRef>
-          <a:fillRef idx="3">
-            <a:schemeClr val="accent1"/>
-          </a:fillRef>
-          <a:effectRef idx="2">
-            <a:schemeClr val="accent1"/>
-          </a:effectRef>
-          <a:fontRef idx="minor">
-            <a:schemeClr val="lt1"/>
-          </a:fontRef>
-        </p:style>
-        <p:txBody>
-          <a:bodyPr rtlCol="0" anchor="ctr"/>
-          <a:lstStyle/>
-          <a:p>
-            <a:pPr algn="ctr"/>
-          </a:p>
-        </p:txBody>
-      </p:sp>
-      <p:sp>
-        <p:nvSpPr>
-          <p:cNvPr id="11" name="TextBox 10"/>
-          <p:cNvSpPr txBox="1"/>
-          <p:nvPr/>
-        </p:nvSpPr>
-        <p:spPr>
-          <a:xfrm>
-            <a:off x="868680" y="1965960"/>
-            <a:ext cx="384048" cy="384048"/>
-          </a:xfrm>
-          <a:prstGeom prst="rect">
-            <a:avLst/>
-          </a:prstGeom>
-          <a:noFill/>
-        </p:spPr>
-        <p:txBody>
-          <a:bodyPr wrap="square" lIns="0" rIns="0" tIns="0" bIns="0" anchor="ctr"/>
-          <a:lstStyle/>
-          <a:p>
-            <a:pPr algn="ctr"/>
-            <a:r>
-              <a:rPr sz="1300" b="1" i="0">
-                <a:solidFill>
-                  <a:srgbClr val="FFFFFF"/>
-                </a:solidFill>
-                <a:latin typeface="Calibri"/>
-              </a:rPr>
-              <a:t>1</a:t>
-            </a:r>
-          </a:p>
-        </p:txBody>
-      </p:sp>
-      <p:sp>
-        <p:nvSpPr>
-          <p:cNvPr id="12" name="Rectangle 11"/>
-          <p:cNvSpPr/>
-          <p:nvPr/>
-        </p:nvSpPr>
-        <p:spPr>
-          <a:xfrm>
-            <a:off x="1051560" y="2368296"/>
-            <a:ext cx="18288" cy="237743"/>
-          </a:xfrm>
-          <a:prstGeom prst="rect">
-            <a:avLst/>
-          </a:prstGeom>
-          <a:solidFill>
-            <a:srgbClr val="D5DEEA"/>
-          </a:solidFill>
-          <a:ln>
-            <a:noFill/>
-          </a:ln>
-          <a:effectLst/>
-        </p:spPr>
-        <p:style>
-          <a:lnRef idx="1">
-            <a:schemeClr val="accent1"/>
-          </a:lnRef>
-          <a:fillRef idx="3">
-            <a:schemeClr val="accent1"/>
-          </a:fillRef>
-          <a:effectRef idx="2">
-            <a:schemeClr val="accent1"/>
-          </a:effectRef>
-          <a:fontRef idx="minor">
-            <a:schemeClr val="lt1"/>
-          </a:fontRef>
-        </p:style>
-        <p:txBody>
-          <a:bodyPr rtlCol="0" anchor="ctr"/>
-          <a:lstStyle/>
-          <a:p>
-            <a:pPr algn="ctr"/>
-          </a:p>
-        </p:txBody>
-      </p:sp>
-      <p:sp>
-        <p:nvSpPr>
-          <p:cNvPr id="13" name="TextBox 12"/>
-          <p:cNvSpPr txBox="1"/>
-          <p:nvPr/>
-        </p:nvSpPr>
-        <p:spPr>
-          <a:xfrm>
-            <a:off x="1463040" y="1965960"/>
-            <a:ext cx="5897880" cy="384048"/>
-          </a:xfrm>
-          <a:prstGeom prst="rect">
-            <a:avLst/>
-          </a:prstGeom>
-          <a:noFill/>
-        </p:spPr>
-        <p:txBody>
-          <a:bodyPr wrap="square" lIns="0" rIns="0" tIns="0" bIns="0" anchor="ctr"/>
-          <a:lstStyle/>
-          <a:p>
-            <a:pPr algn="l"/>
-            <a:r>
-              <a:rPr sz="1500" b="0" i="0">
-                <a:solidFill>
-                  <a:srgbClr val="1F2937"/>
-                </a:solidFill>
-                <a:latin typeface="Calibri"/>
-              </a:rPr>
-              <a:t>+ Add on the User list</a:t>
-            </a:r>
-          </a:p>
-        </p:txBody>
-      </p:sp>
-      <p:sp>
-        <p:nvSpPr>
-          <p:cNvPr id="14" name="Oval 13"/>
-          <p:cNvSpPr/>
-          <p:nvPr/>
-        </p:nvSpPr>
-        <p:spPr>
-          <a:xfrm>
-            <a:off x="868680" y="2624328"/>
-            <a:ext cx="384048" cy="384048"/>
-          </a:xfrm>
-          <a:prstGeom prst="ellipse">
-            <a:avLst/>
-          </a:prstGeom>
-          <a:solidFill>
-            <a:srgbClr val="1E88E5"/>
-          </a:solidFill>
-          <a:ln>
-            <a:noFill/>
-          </a:ln>
-          <a:effectLst/>
-        </p:spPr>
-        <p:style>
-          <a:lnRef idx="1">
-            <a:schemeClr val="accent1"/>
-          </a:lnRef>
-          <a:fillRef idx="3">
-            <a:schemeClr val="accent1"/>
-          </a:fillRef>
-          <a:effectRef idx="2">
-            <a:schemeClr val="accent1"/>
-          </a:effectRef>
-          <a:fontRef idx="minor">
-            <a:schemeClr val="lt1"/>
-          </a:fontRef>
-        </p:style>
-        <p:txBody>
-          <a:bodyPr rtlCol="0" anchor="ctr"/>
-          <a:lstStyle/>
-          <a:p>
-            <a:pPr algn="ctr"/>
-          </a:p>
-        </p:txBody>
-      </p:sp>
-      <p:sp>
-        <p:nvSpPr>
-          <p:cNvPr id="15" name="TextBox 14"/>
-          <p:cNvSpPr txBox="1"/>
-          <p:nvPr/>
-        </p:nvSpPr>
-        <p:spPr>
-          <a:xfrm>
-            <a:off x="868680" y="2624328"/>
-            <a:ext cx="384048" cy="384048"/>
-          </a:xfrm>
-          <a:prstGeom prst="rect">
-            <a:avLst/>
-          </a:prstGeom>
-          <a:noFill/>
-        </p:spPr>
-        <p:txBody>
-          <a:bodyPr wrap="square" lIns="0" rIns="0" tIns="0" bIns="0" anchor="ctr"/>
-          <a:lstStyle/>
-          <a:p>
-            <a:pPr algn="ctr"/>
-            <a:r>
-              <a:rPr sz="1300" b="1" i="0">
-                <a:solidFill>
-                  <a:srgbClr val="FFFFFF"/>
-                </a:solidFill>
-                <a:latin typeface="Calibri"/>
-              </a:rPr>
-              <a:t>2</a:t>
-            </a:r>
-          </a:p>
-        </p:txBody>
-      </p:sp>
-      <p:sp>
-        <p:nvSpPr>
-          <p:cNvPr id="16" name="Rectangle 15"/>
-          <p:cNvSpPr/>
-          <p:nvPr/>
-        </p:nvSpPr>
-        <p:spPr>
-          <a:xfrm>
-            <a:off x="1051560" y="3026664"/>
-            <a:ext cx="18288" cy="237743"/>
-          </a:xfrm>
-          <a:prstGeom prst="rect">
-            <a:avLst/>
-          </a:prstGeom>
-          <a:solidFill>
-            <a:srgbClr val="D5DEEA"/>
-          </a:solidFill>
-          <a:ln>
-            <a:noFill/>
-          </a:ln>
-          <a:effectLst/>
-        </p:spPr>
-        <p:style>
-          <a:lnRef idx="1">
-            <a:schemeClr val="accent1"/>
-          </a:lnRef>
-          <a:fillRef idx="3">
-            <a:schemeClr val="accent1"/>
-          </a:fillRef>
-          <a:effectRef idx="2">
-            <a:schemeClr val="accent1"/>
-          </a:effectRef>
-          <a:fontRef idx="minor">
-            <a:schemeClr val="lt1"/>
-          </a:fontRef>
-        </p:style>
-        <p:txBody>
-          <a:bodyPr rtlCol="0" anchor="ctr"/>
-          <a:lstStyle/>
-          <a:p>
-            <a:pPr algn="ctr"/>
-          </a:p>
-        </p:txBody>
-      </p:sp>
-      <p:sp>
-        <p:nvSpPr>
-          <p:cNvPr id="17" name="TextBox 16"/>
-          <p:cNvSpPr txBox="1"/>
-          <p:nvPr/>
-        </p:nvSpPr>
-        <p:spPr>
-          <a:xfrm>
-            <a:off x="1463040" y="2624328"/>
-            <a:ext cx="5897880" cy="384048"/>
-          </a:xfrm>
-          <a:prstGeom prst="rect">
-            <a:avLst/>
-          </a:prstGeom>
-          <a:noFill/>
-        </p:spPr>
-        <p:txBody>
-          <a:bodyPr wrap="square" lIns="0" rIns="0" tIns="0" bIns="0" anchor="ctr"/>
-          <a:lstStyle/>
-          <a:p>
-            <a:pPr algn="l"/>
-            <a:r>
-              <a:rPr sz="1500" b="0" i="0">
-                <a:solidFill>
-                  <a:srgbClr val="1F2937"/>
-                </a:solidFill>
-                <a:latin typeface="Calibri"/>
-              </a:rPr>
-              <a:t>User name, display name, e-mail</a:t>
-            </a:r>
-          </a:p>
-        </p:txBody>
-      </p:sp>
-      <p:sp>
-        <p:nvSpPr>
-          <p:cNvPr id="18" name="Oval 17"/>
-          <p:cNvSpPr/>
-          <p:nvPr/>
-        </p:nvSpPr>
-        <p:spPr>
-          <a:xfrm>
-            <a:off x="868680" y="3282696"/>
-            <a:ext cx="384048" cy="384048"/>
-          </a:xfrm>
-          <a:prstGeom prst="ellipse">
-            <a:avLst/>
-          </a:prstGeom>
-          <a:solidFill>
-            <a:srgbClr val="1E88E5"/>
-          </a:solidFill>
-          <a:ln>
-            <a:noFill/>
-          </a:ln>
-          <a:effectLst/>
-        </p:spPr>
-        <p:style>
-          <a:lnRef idx="1">
-            <a:schemeClr val="accent1"/>
-          </a:lnRef>
-          <a:fillRef idx="3">
-            <a:schemeClr val="accent1"/>
-          </a:fillRef>
-          <a:effectRef idx="2">
-            <a:schemeClr val="accent1"/>
-          </a:effectRef>
-          <a:fontRef idx="minor">
-            <a:schemeClr val="lt1"/>
-          </a:fontRef>
-        </p:style>
-        <p:txBody>
-          <a:bodyPr rtlCol="0" anchor="ctr"/>
-          <a:lstStyle/>
-          <a:p>
-            <a:pPr algn="ctr"/>
-          </a:p>
-        </p:txBody>
-      </p:sp>
-      <p:sp>
-        <p:nvSpPr>
-          <p:cNvPr id="19" name="TextBox 18"/>
-          <p:cNvSpPr txBox="1"/>
-          <p:nvPr/>
-        </p:nvSpPr>
-        <p:spPr>
-          <a:xfrm>
-            <a:off x="868680" y="3282696"/>
-            <a:ext cx="384048" cy="384048"/>
-          </a:xfrm>
-          <a:prstGeom prst="rect">
-            <a:avLst/>
-          </a:prstGeom>
-          <a:noFill/>
-        </p:spPr>
-        <p:txBody>
-          <a:bodyPr wrap="square" lIns="0" rIns="0" tIns="0" bIns="0" anchor="ctr"/>
-          <a:lstStyle/>
-          <a:p>
-            <a:pPr algn="ctr"/>
-            <a:r>
-              <a:rPr sz="1300" b="1" i="0">
-                <a:solidFill>
-                  <a:srgbClr val="FFFFFF"/>
-                </a:solidFill>
-                <a:latin typeface="Calibri"/>
-              </a:rPr>
-              <a:t>3</a:t>
-            </a:r>
-          </a:p>
-        </p:txBody>
-      </p:sp>
-      <p:sp>
-        <p:nvSpPr>
-          <p:cNvPr id="20" name="Rectangle 19"/>
-          <p:cNvSpPr/>
-          <p:nvPr/>
-        </p:nvSpPr>
-        <p:spPr>
-          <a:xfrm>
-            <a:off x="1051560" y="3685032"/>
-            <a:ext cx="18288" cy="237743"/>
-          </a:xfrm>
-          <a:prstGeom prst="rect">
-            <a:avLst/>
-          </a:prstGeom>
-          <a:solidFill>
-            <a:srgbClr val="D5DEEA"/>
-          </a:solidFill>
-          <a:ln>
-            <a:noFill/>
-          </a:ln>
-          <a:effectLst/>
-        </p:spPr>
-        <p:style>
-          <a:lnRef idx="1">
-            <a:schemeClr val="accent1"/>
-          </a:lnRef>
-          <a:fillRef idx="3">
-            <a:schemeClr val="accent1"/>
-          </a:fillRef>
-          <a:effectRef idx="2">
-            <a:schemeClr val="accent1"/>
-          </a:effectRef>
-          <a:fontRef idx="minor">
-            <a:schemeClr val="lt1"/>
-          </a:fontRef>
-        </p:style>
-        <p:txBody>
-          <a:bodyPr rtlCol="0" anchor="ctr"/>
-          <a:lstStyle/>
-          <a:p>
-            <a:pPr algn="ctr"/>
-          </a:p>
-        </p:txBody>
-      </p:sp>
-      <p:sp>
-        <p:nvSpPr>
-          <p:cNvPr id="21" name="TextBox 20"/>
-          <p:cNvSpPr txBox="1"/>
-          <p:nvPr/>
-        </p:nvSpPr>
-        <p:spPr>
-          <a:xfrm>
-            <a:off x="1463040" y="3282696"/>
-            <a:ext cx="5897880" cy="384048"/>
-          </a:xfrm>
-          <a:prstGeom prst="rect">
-            <a:avLst/>
-          </a:prstGeom>
-          <a:noFill/>
-        </p:spPr>
-        <p:txBody>
-          <a:bodyPr wrap="square" lIns="0" rIns="0" tIns="0" bIns="0" anchor="ctr"/>
-          <a:lstStyle/>
-          <a:p>
-            <a:pPr algn="l"/>
-            <a:r>
-              <a:rPr sz="1500" b="0" i="0">
-                <a:solidFill>
-                  <a:srgbClr val="1F2937"/>
-                </a:solidFill>
-                <a:latin typeface="Calibri"/>
-              </a:rPr>
-              <a:t>Tick one or more roles</a:t>
-            </a:r>
-          </a:p>
-        </p:txBody>
-      </p:sp>
-      <p:sp>
-        <p:nvSpPr>
-          <p:cNvPr id="22" name="Oval 21"/>
-          <p:cNvSpPr/>
-          <p:nvPr/>
-        </p:nvSpPr>
-        <p:spPr>
-          <a:xfrm>
-            <a:off x="868680" y="3941064"/>
-            <a:ext cx="384048" cy="384048"/>
-          </a:xfrm>
-          <a:prstGeom prst="ellipse">
-            <a:avLst/>
-          </a:prstGeom>
-          <a:solidFill>
-            <a:srgbClr val="1E88E5"/>
-          </a:solidFill>
-          <a:ln>
-            <a:noFill/>
-          </a:ln>
-          <a:effectLst/>
-        </p:spPr>
-        <p:style>
-          <a:lnRef idx="1">
-            <a:schemeClr val="accent1"/>
-          </a:lnRef>
-          <a:fillRef idx="3">
-            <a:schemeClr val="accent1"/>
-          </a:fillRef>
-          <a:effectRef idx="2">
-            <a:schemeClr val="accent1"/>
-          </a:effectRef>
-          <a:fontRef idx="minor">
-            <a:schemeClr val="lt1"/>
-          </a:fontRef>
-        </p:style>
-        <p:txBody>
-          <a:bodyPr rtlCol="0" anchor="ctr"/>
-          <a:lstStyle/>
-          <a:p>
-            <a:pPr algn="ctr"/>
-          </a:p>
-        </p:txBody>
-      </p:sp>
-      <p:sp>
-        <p:nvSpPr>
-          <p:cNvPr id="23" name="TextBox 22"/>
-          <p:cNvSpPr txBox="1"/>
-          <p:nvPr/>
-        </p:nvSpPr>
-        <p:spPr>
-          <a:xfrm>
-            <a:off x="868680" y="3941064"/>
-            <a:ext cx="384048" cy="384048"/>
-          </a:xfrm>
-          <a:prstGeom prst="rect">
-            <a:avLst/>
-          </a:prstGeom>
-          <a:noFill/>
-        </p:spPr>
-        <p:txBody>
-          <a:bodyPr wrap="square" lIns="0" rIns="0" tIns="0" bIns="0" anchor="ctr"/>
-          <a:lstStyle/>
-          <a:p>
-            <a:pPr algn="ctr"/>
-            <a:r>
-              <a:rPr sz="1300" b="1" i="0">
-                <a:solidFill>
-                  <a:srgbClr val="FFFFFF"/>
-                </a:solidFill>
-                <a:latin typeface="Calibri"/>
-              </a:rPr>
-              <a:t>4</a:t>
-            </a:r>
-          </a:p>
-        </p:txBody>
-      </p:sp>
-      <p:sp>
-        <p:nvSpPr>
-          <p:cNvPr id="24" name="Rectangle 23"/>
-          <p:cNvSpPr/>
-          <p:nvPr/>
-        </p:nvSpPr>
-        <p:spPr>
-          <a:xfrm>
-            <a:off x="1051560" y="4343400"/>
-            <a:ext cx="18288" cy="237743"/>
-          </a:xfrm>
-          <a:prstGeom prst="rect">
-            <a:avLst/>
-          </a:prstGeom>
-          <a:solidFill>
-            <a:srgbClr val="D5DEEA"/>
-          </a:solidFill>
-          <a:ln>
-            <a:noFill/>
-          </a:ln>
-          <a:effectLst/>
-        </p:spPr>
-        <p:style>
-          <a:lnRef idx="1">
-            <a:schemeClr val="accent1"/>
-          </a:lnRef>
-          <a:fillRef idx="3">
-            <a:schemeClr val="accent1"/>
-          </a:fillRef>
-          <a:effectRef idx="2">
-            <a:schemeClr val="accent1"/>
-          </a:effectRef>
-          <a:fontRef idx="minor">
-            <a:schemeClr val="lt1"/>
-          </a:fontRef>
-        </p:style>
-        <p:txBody>
-          <a:bodyPr rtlCol="0" anchor="ctr"/>
-          <a:lstStyle/>
-          <a:p>
-            <a:pPr algn="ctr"/>
-          </a:p>
-        </p:txBody>
-      </p:sp>
-      <p:sp>
-        <p:nvSpPr>
-          <p:cNvPr id="25" name="TextBox 24"/>
-          <p:cNvSpPr txBox="1"/>
-          <p:nvPr/>
-        </p:nvSpPr>
-        <p:spPr>
-          <a:xfrm>
-            <a:off x="1463040" y="3941064"/>
-            <a:ext cx="5897880" cy="384048"/>
-          </a:xfrm>
-          <a:prstGeom prst="rect">
-            <a:avLst/>
-          </a:prstGeom>
-          <a:noFill/>
-        </p:spPr>
-        <p:txBody>
-          <a:bodyPr wrap="square" lIns="0" rIns="0" tIns="0" bIns="0" anchor="ctr"/>
-          <a:lstStyle/>
-          <a:p>
-            <a:pPr algn="l"/>
-            <a:r>
-              <a:rPr sz="1500" b="0" i="0">
-                <a:solidFill>
-                  <a:srgbClr val="1F2937"/>
-                </a:solidFill>
-                <a:latin typeface="Calibri"/>
-              </a:rPr>
-              <a:t>Initial password (policy applies)</a:t>
-            </a:r>
-          </a:p>
-        </p:txBody>
-      </p:sp>
-      <p:sp>
-        <p:nvSpPr>
-          <p:cNvPr id="26" name="Oval 25"/>
-          <p:cNvSpPr/>
-          <p:nvPr/>
-        </p:nvSpPr>
-        <p:spPr>
-          <a:xfrm>
-            <a:off x="868680" y="4599431"/>
-            <a:ext cx="384048" cy="384048"/>
-          </a:xfrm>
-          <a:prstGeom prst="ellipse">
-            <a:avLst/>
-          </a:prstGeom>
-          <a:solidFill>
-            <a:srgbClr val="43A047"/>
-          </a:solidFill>
-          <a:ln>
-            <a:noFill/>
-          </a:ln>
-          <a:effectLst/>
-        </p:spPr>
-        <p:style>
-          <a:lnRef idx="1">
-            <a:schemeClr val="accent1"/>
-          </a:lnRef>
-          <a:fillRef idx="3">
-            <a:schemeClr val="accent1"/>
-          </a:fillRef>
-          <a:effectRef idx="2">
-            <a:schemeClr val="accent1"/>
-          </a:effectRef>
-          <a:fontRef idx="minor">
-            <a:schemeClr val="lt1"/>
-          </a:fontRef>
-        </p:style>
-        <p:txBody>
-          <a:bodyPr rtlCol="0" anchor="ctr"/>
-          <a:lstStyle/>
-          <a:p>
-            <a:pPr algn="ctr"/>
-          </a:p>
-        </p:txBody>
-      </p:sp>
-      <p:sp>
-        <p:nvSpPr>
-          <p:cNvPr id="27" name="TextBox 26"/>
-          <p:cNvSpPr txBox="1"/>
-          <p:nvPr/>
-        </p:nvSpPr>
-        <p:spPr>
-          <a:xfrm>
-            <a:off x="868680" y="4599431"/>
-            <a:ext cx="384048" cy="384048"/>
-          </a:xfrm>
-          <a:prstGeom prst="rect">
-            <a:avLst/>
-          </a:prstGeom>
-          <a:noFill/>
-        </p:spPr>
-        <p:txBody>
-          <a:bodyPr wrap="square" lIns="0" rIns="0" tIns="0" bIns="0" anchor="ctr"/>
-          <a:lstStyle/>
-          <a:p>
-            <a:pPr algn="ctr"/>
-            <a:r>
-              <a:rPr sz="1300" b="1" i="0">
-                <a:solidFill>
-                  <a:srgbClr val="FFFFFF"/>
-                </a:solidFill>
-                <a:latin typeface="Calibri"/>
-              </a:rPr>
-              <a:t>5</a:t>
-            </a:r>
-          </a:p>
-        </p:txBody>
-      </p:sp>
-      <p:sp>
-        <p:nvSpPr>
-          <p:cNvPr id="28" name="TextBox 27"/>
-          <p:cNvSpPr txBox="1"/>
-          <p:nvPr/>
-        </p:nvSpPr>
-        <p:spPr>
-          <a:xfrm>
-            <a:off x="1463040" y="4599431"/>
-            <a:ext cx="5897880" cy="384048"/>
-          </a:xfrm>
-          <a:prstGeom prst="rect">
-            <a:avLst/>
-          </a:prstGeom>
-          <a:noFill/>
-        </p:spPr>
-        <p:txBody>
-          <a:bodyPr wrap="square" lIns="0" rIns="0" tIns="0" bIns="0" anchor="ctr"/>
-          <a:lstStyle/>
-          <a:p>
-            <a:pPr algn="l"/>
-            <a:r>
-              <a:rPr sz="1500" b="0" i="0">
-                <a:solidFill>
-                  <a:srgbClr val="1F2937"/>
-                </a:solidFill>
-                <a:latin typeface="Calibri"/>
-              </a:rPr>
-              <a:t>Save</a:t>
-            </a:r>
-          </a:p>
-        </p:txBody>
-      </p:sp>
-      <p:sp>
-        <p:nvSpPr>
-          <p:cNvPr id="29" name="TextBox 28"/>
+        </p:spPr>
+      </p:pic>
+      <p:sp>
+        <p:nvSpPr>
+          <p:cNvPr id="10" name="TextBox 9"/>
           <p:cNvSpPr txBox="1"/>
           <p:nvPr/>
         </p:nvSpPr>
@@ -12129,14 +11448,14 @@
                 </a:solidFill>
                 <a:latin typeface="Calibri"/>
               </a:rPr>
-              <a:t>Steps to add a user</a:t>
-            </a:r>
-          </a:p>
-        </p:txBody>
-      </p:sp>
-      <p:sp>
-        <p:nvSpPr>
-          <p:cNvPr id="30" name="Rounded Rectangle 29"/>
+              <a:t>Live screen — Add User (example values) — signed in as carmela.morfe</a:t>
+            </a:r>
+          </a:p>
+        </p:txBody>
+      </p:sp>
+      <p:sp>
+        <p:nvSpPr>
+          <p:cNvPr id="11" name="Rounded Rectangle 10"/>
           <p:cNvSpPr/>
           <p:nvPr/>
         </p:nvSpPr>
@@ -12184,7 +11503,7 @@
       </p:sp>
       <p:sp>
         <p:nvSpPr>
-          <p:cNvPr id="31" name="TextBox 30"/>
+          <p:cNvPr id="12" name="TextBox 11"/>
           <p:cNvSpPr txBox="1"/>
           <p:nvPr/>
         </p:nvSpPr>
@@ -12210,14 +11529,14 @@
                 </a:solidFill>
                 <a:latin typeface="Calibri"/>
               </a:rPr>
-              <a:t>Master &gt; User Management &gt; User &gt; Add</a:t>
-            </a:r>
-          </a:p>
-        </p:txBody>
-      </p:sp>
-      <p:sp>
-        <p:nvSpPr>
-          <p:cNvPr id="32" name="TextBox 31"/>
+              <a:t>Master &gt; User Management &gt; User &gt; + Add</a:t>
+            </a:r>
+          </a:p>
+        </p:txBody>
+      </p:sp>
+      <p:sp>
+        <p:nvSpPr>
+          <p:cNvPr id="13" name="TextBox 12"/>
           <p:cNvSpPr txBox="1"/>
           <p:nvPr/>
         </p:nvSpPr>
@@ -12261,7 +11580,7 @@
                 </a:solidFill>
                 <a:latin typeface="Calibri"/>
               </a:rPr>
-              <a:t>at least one role; unique user name.</a:t>
+              <a:t>user name, e-mail, display name and at least one role; only the IT administrator grants admin roles.</a:t>
             </a:r>
           </a:p>
           <a:p>
@@ -12291,7 +11610,7 @@
                 </a:solidFill>
                 <a:latin typeface="Calibri"/>
               </a:rPr>
-              <a:t>min 8, upper, lower, digit, symbol; last 5 not reused; expires after 90 days.</a:t>
+              <a:t>leave it empty: a temporary password is shown once; the user must change it at first sign-in.</a:t>
             </a:r>
           </a:p>
           <a:p>
@@ -12312,7 +11631,7 @@
                 </a:solidFill>
                 <a:latin typeface="Calibri"/>
               </a:rPr>
-              <a:t>Two-factor:  </a:t>
+              <a:t>Policy:  </a:t>
             </a:r>
             <a:r>
               <a:rPr sz="1500">
@@ -12321,7 +11640,7 @@
                 </a:solidFill>
                 <a:latin typeface="Calibri"/>
               </a:rPr>
-              <a:t>required for roles listed in security.require_2fa_roles; reset for lost devices.</a:t>
+              <a:t>min 8, upper, lower, digit, symbol; last 5 not reused; expires after 90 days.</a:t>
             </a:r>
           </a:p>
           <a:p>
@@ -12685,7 +12004,7 @@
                 </a:solidFill>
                 <a:latin typeface="Calibri"/>
               </a:rPr>
-              <a:t>Same screen as the access administrator sees (captured as BrokerVerse)</a:t>
+              <a:t>Live screen — Master &gt; User Management &gt; Role — signed in as carmela.morfe</a:t>
             </a:r>
           </a:p>
         </p:txBody>
@@ -13211,7 +12530,7 @@
                 </a:solidFill>
                 <a:latin typeface="Calibri"/>
               </a:rPr>
-              <a:t>Same screen as the access administrator sees (captured as BrokerVerse)</a:t>
+              <a:t>Live screen — Master &gt; Audit Trail — signed in as carmela.morfe</a:t>
             </a:r>
           </a:p>
         </p:txBody>
@@ -13737,7 +13056,7 @@
                 </a:solidFill>
                 <a:latin typeface="Calibri"/>
               </a:rPr>
-              <a:t>Screen from the recorded end-to-end run — Audit trail filtered to sign-ins — carmela.morfe</a:t>
+              <a:t>Live screen — Sign-in history of a user — signed in as carmela.morfe</a:t>
             </a:r>
           </a:p>
         </p:txBody>
@@ -13818,7 +13137,7 @@
                 </a:solidFill>
                 <a:latin typeface="Calibri"/>
               </a:rPr>
-              <a:t>Master &gt; Audit Trail (record type: session)</a:t>
+              <a:t>User &gt; … &gt; Sign-in history</a:t>
             </a:r>
           </a:p>
         </p:txBody>
@@ -13869,7 +13188,7 @@
                 </a:solidFill>
                 <a:latin typeface="Calibri"/>
               </a:rPr>
-              <a:t>who signed in and when: record type “session”, action login.</a:t>
+              <a:t>every sign-in attempt of a user: date and time, result, detail, method, IP address, browser.</a:t>
             </a:r>
           </a:p>
           <a:p>
@@ -13890,7 +13209,7 @@
                 </a:solidFill>
                 <a:latin typeface="Calibri"/>
               </a:rPr>
-              <a:t>Per user:  </a:t>
+              <a:t>Details:  </a:t>
             </a:r>
             <a:r>
               <a:rPr sz="1500">
@@ -13899,7 +13218,7 @@
                 </a:solidFill>
                 <a:latin typeface="Calibri"/>
               </a:rPr>
-              <a:t>the API also gives each user’s sign-in history.</a:t>
+              <a:t>wrong password, account locked, code requested, password change required…</a:t>
             </a:r>
           </a:p>
           <a:p>
@@ -13929,7 +13248,7 @@
                 </a:solidFill>
                 <a:latin typeface="Calibri"/>
               </a:rPr>
-              <a:t>repeated failed sign-ins lock the account; unlock from the user list.</a:t>
+              <a:t>5 failed sign-ins lock the account; use Unlock on the user row.</a:t>
             </a:r>
           </a:p>
           <a:p>
@@ -13950,7 +13269,7 @@
                 </a:solidFill>
                 <a:latin typeface="Calibri"/>
               </a:rPr>
-              <a:t>Limits:  </a:t>
+              <a:t>Audit trail:  </a:t>
             </a:r>
             <a:r>
               <a:rPr sz="1500">
@@ -13959,7 +13278,7 @@
                 </a:solidFill>
                 <a:latin typeface="Calibri"/>
               </a:rPr>
-              <a:t>10 sign-in attempts per 5 minutes per address.</a:t>
+              <a:t>record type “session” lists sign-ins of all users.</a:t>
             </a:r>
           </a:p>
         </p:txBody>
